--- a/docs/migration-orders/monolith-to-microservices-migration-plan-overview.pptx
+++ b/docs/migration-orders/monolith-to-microservices-migration-plan-overview.pptx
@@ -957,7 +957,7 @@
           <a:p>
             <a:r>
               <a:rPr lang="en-US" dirty="0"/>
-              <a:t>All six live in docs/migration-orders/ except CLAUDE.md (repo root, auto-read by Claude Code every session). This is the artifacts-are-the-only-channel rule made concrete: Deviations + CLAUDE.md are mandatory in the Executor's handoff.</a:t>
+              <a:t>All seven live in docs/migration-orders/ except CLAUDE.md (repo root, auto-read by Claude Code every session). This is the artifacts-are-the-only-channel rule made concrete: Deviations + CLAUDE.md are mandatory in the Executor's handoff.</a:t>
             </a:r>
             <a:endParaRPr lang="en-US" dirty="0"/>
           </a:p>
@@ -6718,7 +6718,7 @@
                 <a:ea typeface="Calibri" pitchFamily="34" charset="-122"/>
                 <a:cs typeface="Calibri" pitchFamily="34" charset="-120"/>
               </a:rPr>
-              <a:t>CONFIRMs the approved order against code + runtime state, executes it with tests and commits, records every deviation, updates the five artifacts, then PRE-DRAFTs the next session's order.</a:t>
+              <a:t>CONFIRMs the approved order against code + runtime state, executes it with tests and commits, records every deviation, updates the memory artifacts, then PRE-DRAFTs the next session's order.</a:t>
             </a:r>
             <a:endParaRPr lang="en-US" sz="1050" dirty="0"/>
           </a:p>
@@ -7582,7 +7582,7 @@
                 <a:ea typeface="Calibri" pitchFamily="34" charset="-122"/>
                 <a:cs typeface="Calibri" pitchFamily="34" charset="-120"/>
               </a:rPr>
-              <a:t>Claude Code forgets everything between sessions, and the Advisor never sees its transcript. These six files ARE the project's memory — if it isn't written in them, it didn't happen.</a:t>
+              <a:t>Claude Code forgets everything between sessions, and the Advisor never sees its transcript. These seven files ARE the project's memory — if it isn't written in them, it didn't happen.</a:t>
             </a:r>
             <a:endParaRPr lang="en-US" sz="1300" dirty="0"/>
           </a:p>
@@ -7596,12 +7596,12 @@
         </p:nvSpPr>
         <p:spPr>
           <a:xfrm>
-            <a:off x="502920" y="1965960"/>
-            <a:ext cx="5532120" cy="1207008"/>
+            <a:off x="502920" y="1847088"/>
+            <a:ext cx="5532120" cy="969264"/>
           </a:xfrm>
           <a:prstGeom prst="roundRect">
             <a:avLst>
-              <a:gd name="adj" fmla="val 6818"/>
+              <a:gd name="adj" fmla="val 8491"/>
             </a:avLst>
           </a:prstGeom>
           <a:solidFill>
@@ -7618,24 +7618,24 @@
         </p:nvSpPr>
         <p:spPr>
           <a:xfrm>
-            <a:off x="704088" y="2084832"/>
-            <a:ext cx="5129784" cy="274320"/>
-          </a:xfrm>
-          <a:prstGeom prst="rect">
-            <a:avLst/>
-          </a:prstGeom>
-          <a:noFill/>
-          <a:ln/>
-        </p:spPr>
-        <p:txBody>
-          <a:bodyPr wrap="square" lIns="0" tIns="0" rIns="0" bIns="0" rtlCol="0" anchor="ctr"/>
-          <a:lstStyle/>
-          <a:p>
-            <a:pPr indent="0" marL="0">
-              <a:buNone/>
-            </a:pPr>
-            <a:r>
-              <a:rPr lang="en-US" sz="1100" b="1" dirty="0">
+            <a:off x="704088" y="1929384"/>
+            <a:ext cx="5129784" cy="256032"/>
+          </a:xfrm>
+          <a:prstGeom prst="rect">
+            <a:avLst/>
+          </a:prstGeom>
+          <a:noFill/>
+          <a:ln/>
+        </p:spPr>
+        <p:txBody>
+          <a:bodyPr wrap="square" lIns="0" tIns="0" rIns="0" bIns="0" rtlCol="0" anchor="ctr"/>
+          <a:lstStyle/>
+          <a:p>
+            <a:pPr indent="0" marL="0">
+              <a:buNone/>
+            </a:pPr>
+            <a:r>
+              <a:rPr lang="en-US" sz="1050" b="1" dirty="0">
                 <a:solidFill>
                   <a:srgbClr val="0E8C81"/>
                 </a:solidFill>
@@ -7645,7 +7645,7 @@
               </a:rPr>
               <a:t>CLAUDE.md  (repo root)</a:t>
             </a:r>
-            <a:endParaRPr lang="en-US" sz="1100" dirty="0"/>
+            <a:endParaRPr lang="en-US" sz="1050" dirty="0"/>
           </a:p>
         </p:txBody>
       </p:sp>
@@ -7657,8 +7657,8 @@
         </p:nvSpPr>
         <p:spPr>
           <a:xfrm>
-            <a:off x="704088" y="2386584"/>
-            <a:ext cx="5129784" cy="749808"/>
+            <a:off x="704088" y="2194560"/>
+            <a:ext cx="5129784" cy="603504"/>
           </a:xfrm>
           <a:prstGeom prst="rect">
             <a:avLst/>
@@ -7672,12 +7672,12 @@
           <a:p>
             <a:pPr indent="0" marL="0">
               <a:lnSpc>
-                <a:spcPts val="1250"/>
+                <a:spcPts val="1150"/>
               </a:lnSpc>
               <a:buNone/>
             </a:pPr>
             <a:r>
-              <a:rPr lang="en-US" sz="1000" dirty="0">
+              <a:rPr lang="en-US" sz="950" dirty="0">
                 <a:solidFill>
                   <a:srgbClr val="5A6B8C"/>
                 </a:solidFill>
@@ -7687,7 +7687,7 @@
               </a:rPr>
               <a:t>The state block: current session, current order + status, waiting-on clocks, open flags. Executor updates it at EVERY session close — it's what any fresh session reads first.</a:t>
             </a:r>
-            <a:endParaRPr lang="en-US" sz="1000" dirty="0"/>
+            <a:endParaRPr lang="en-US" sz="950" dirty="0"/>
           </a:p>
         </p:txBody>
       </p:sp>
@@ -7699,12 +7699,12 @@
         </p:nvSpPr>
         <p:spPr>
           <a:xfrm>
-            <a:off x="6355080" y="1965960"/>
-            <a:ext cx="5532120" cy="1207008"/>
+            <a:off x="6355080" y="1847088"/>
+            <a:ext cx="5532120" cy="969264"/>
           </a:xfrm>
           <a:prstGeom prst="roundRect">
             <a:avLst>
-              <a:gd name="adj" fmla="val 6818"/>
+              <a:gd name="adj" fmla="val 8491"/>
             </a:avLst>
           </a:prstGeom>
           <a:solidFill>
@@ -7721,24 +7721,24 @@
         </p:nvSpPr>
         <p:spPr>
           <a:xfrm>
-            <a:off x="6556248" y="2084832"/>
-            <a:ext cx="5129784" cy="274320"/>
-          </a:xfrm>
-          <a:prstGeom prst="rect">
-            <a:avLst/>
-          </a:prstGeom>
-          <a:noFill/>
-          <a:ln/>
-        </p:spPr>
-        <p:txBody>
-          <a:bodyPr wrap="square" lIns="0" tIns="0" rIns="0" bIns="0" rtlCol="0" anchor="ctr"/>
-          <a:lstStyle/>
-          <a:p>
-            <a:pPr indent="0" marL="0">
-              <a:buNone/>
-            </a:pPr>
-            <a:r>
-              <a:rPr lang="en-US" sz="1100" b="1" dirty="0">
+            <a:off x="6556248" y="1929384"/>
+            <a:ext cx="5129784" cy="256032"/>
+          </a:xfrm>
+          <a:prstGeom prst="rect">
+            <a:avLst/>
+          </a:prstGeom>
+          <a:noFill/>
+          <a:ln/>
+        </p:spPr>
+        <p:txBody>
+          <a:bodyPr wrap="square" lIns="0" tIns="0" rIns="0" bIns="0" rtlCol="0" anchor="ctr"/>
+          <a:lstStyle/>
+          <a:p>
+            <a:pPr indent="0" marL="0">
+              <a:buNone/>
+            </a:pPr>
+            <a:r>
+              <a:rPr lang="en-US" sz="1050" b="1" dirty="0">
                 <a:solidFill>
                   <a:srgbClr val="0E8C81"/>
                 </a:solidFill>
@@ -7748,7 +7748,7 @@
               </a:rPr>
               <a:t>EXECUTOR-PROTOCOL.md</a:t>
             </a:r>
-            <a:endParaRPr lang="en-US" sz="1100" dirty="0"/>
+            <a:endParaRPr lang="en-US" sz="1050" dirty="0"/>
           </a:p>
         </p:txBody>
       </p:sp>
@@ -7760,8 +7760,8 @@
         </p:nvSpPr>
         <p:spPr>
           <a:xfrm>
-            <a:off x="6556248" y="2386584"/>
-            <a:ext cx="5129784" cy="749808"/>
+            <a:off x="6556248" y="2194560"/>
+            <a:ext cx="5129784" cy="603504"/>
           </a:xfrm>
           <a:prstGeom prst="rect">
             <a:avLst/>
@@ -7775,12 +7775,12 @@
           <a:p>
             <a:pPr indent="0" marL="0">
               <a:lnSpc>
-                <a:spcPts val="1250"/>
+                <a:spcPts val="1150"/>
               </a:lnSpc>
               <a:buNone/>
             </a:pPr>
             <a:r>
-              <a:rPr lang="en-US" sz="1000" dirty="0">
+              <a:rPr lang="en-US" sz="950" dirty="0">
                 <a:solidFill>
                   <a:srgbClr val="5A6B8C"/>
                 </a:solidFill>
@@ -7790,7 +7790,7 @@
               </a:rPr>
               <a:t>Claude Code's rulebook: session open/execute/close lifecycle, stop-and-ask triggers, do-not-touch list, escalation rules. Effectively frozen — changing it is changing the rules of the game.</a:t>
             </a:r>
-            <a:endParaRPr lang="en-US" sz="1000" dirty="0"/>
+            <a:endParaRPr lang="en-US" sz="950" dirty="0"/>
           </a:p>
         </p:txBody>
       </p:sp>
@@ -7802,12 +7802,12 @@
         </p:nvSpPr>
         <p:spPr>
           <a:xfrm>
-            <a:off x="502920" y="3355848"/>
-            <a:ext cx="5532120" cy="1207008"/>
+            <a:off x="502920" y="2962656"/>
+            <a:ext cx="5532120" cy="969264"/>
           </a:xfrm>
           <a:prstGeom prst="roundRect">
             <a:avLst>
-              <a:gd name="adj" fmla="val 6818"/>
+              <a:gd name="adj" fmla="val 8491"/>
             </a:avLst>
           </a:prstGeom>
           <a:solidFill>
@@ -7824,24 +7824,24 @@
         </p:nvSpPr>
         <p:spPr>
           <a:xfrm>
-            <a:off x="704088" y="3474720"/>
-            <a:ext cx="5129784" cy="274320"/>
-          </a:xfrm>
-          <a:prstGeom prst="rect">
-            <a:avLst/>
-          </a:prstGeom>
-          <a:noFill/>
-          <a:ln/>
-        </p:spPr>
-        <p:txBody>
-          <a:bodyPr wrap="square" lIns="0" tIns="0" rIns="0" bIns="0" rtlCol="0" anchor="ctr"/>
-          <a:lstStyle/>
-          <a:p>
-            <a:pPr indent="0" marL="0">
-              <a:buNone/>
-            </a:pPr>
-            <a:r>
-              <a:rPr lang="en-US" sz="1100" b="1" dirty="0">
+            <a:off x="704088" y="3044952"/>
+            <a:ext cx="5129784" cy="256032"/>
+          </a:xfrm>
+          <a:prstGeom prst="rect">
+            <a:avLst/>
+          </a:prstGeom>
+          <a:noFill/>
+          <a:ln/>
+        </p:spPr>
+        <p:txBody>
+          <a:bodyPr wrap="square" lIns="0" tIns="0" rIns="0" bIns="0" rtlCol="0" anchor="ctr"/>
+          <a:lstStyle/>
+          <a:p>
+            <a:pPr indent="0" marL="0">
+              <a:buNone/>
+            </a:pPr>
+            <a:r>
+              <a:rPr lang="en-US" sz="1050" b="1" dirty="0">
                 <a:solidFill>
                   <a:srgbClr val="0E8C81"/>
                 </a:solidFill>
@@ -7851,7 +7851,7 @@
               </a:rPr>
               <a:t>&lt;session&gt;.migration-order.md</a:t>
             </a:r>
-            <a:endParaRPr lang="en-US" sz="1100" dirty="0"/>
+            <a:endParaRPr lang="en-US" sz="1050" dirty="0"/>
           </a:p>
         </p:txBody>
       </p:sp>
@@ -7863,8 +7863,8 @@
         </p:nvSpPr>
         <p:spPr>
           <a:xfrm>
-            <a:off x="704088" y="3776472"/>
-            <a:ext cx="5129784" cy="749808"/>
+            <a:off x="704088" y="3310128"/>
+            <a:ext cx="5129784" cy="603504"/>
           </a:xfrm>
           <a:prstGeom prst="rect">
             <a:avLst/>
@@ -7878,12 +7878,12 @@
           <a:p>
             <a:pPr indent="0" marL="0">
               <a:lnSpc>
-                <a:spcPts val="1250"/>
+                <a:spcPts val="1150"/>
               </a:lnSpc>
               <a:buNone/>
             </a:pPr>
             <a:r>
-              <a:rPr lang="en-US" sz="1000" dirty="0">
+              <a:rPr lang="en-US" sz="950" dirty="0">
                 <a:solidFill>
                   <a:srgbClr val="5A6B8C"/>
                 </a:solidFill>
@@ -7893,7 +7893,7 @@
               </a:rPr>
               <a:t>One per session: the approved work plan, its Deviations (filled during execution), and the handoff. Status in the header tracks the lifecycle.</a:t>
             </a:r>
-            <a:endParaRPr lang="en-US" sz="1000" dirty="0"/>
+            <a:endParaRPr lang="en-US" sz="950" dirty="0"/>
           </a:p>
         </p:txBody>
       </p:sp>
@@ -7905,12 +7905,12 @@
         </p:nvSpPr>
         <p:spPr>
           <a:xfrm>
-            <a:off x="6355080" y="3355848"/>
-            <a:ext cx="5532120" cy="1207008"/>
+            <a:off x="6355080" y="2962656"/>
+            <a:ext cx="5532120" cy="969264"/>
           </a:xfrm>
           <a:prstGeom prst="roundRect">
             <a:avLst>
-              <a:gd name="adj" fmla="val 6818"/>
+              <a:gd name="adj" fmla="val 8491"/>
             </a:avLst>
           </a:prstGeom>
           <a:solidFill>
@@ -7927,24 +7927,24 @@
         </p:nvSpPr>
         <p:spPr>
           <a:xfrm>
-            <a:off x="6556248" y="3474720"/>
-            <a:ext cx="5129784" cy="274320"/>
-          </a:xfrm>
-          <a:prstGeom prst="rect">
-            <a:avLst/>
-          </a:prstGeom>
-          <a:noFill/>
-          <a:ln/>
-        </p:spPr>
-        <p:txBody>
-          <a:bodyPr wrap="square" lIns="0" tIns="0" rIns="0" bIns="0" rtlCol="0" anchor="ctr"/>
-          <a:lstStyle/>
-          <a:p>
-            <a:pPr indent="0" marL="0">
-              <a:buNone/>
-            </a:pPr>
-            <a:r>
-              <a:rPr lang="en-US" sz="1100" b="1" dirty="0">
+            <a:off x="6556248" y="3044952"/>
+            <a:ext cx="5129784" cy="256032"/>
+          </a:xfrm>
+          <a:prstGeom prst="rect">
+            <a:avLst/>
+          </a:prstGeom>
+          <a:noFill/>
+          <a:ln/>
+        </p:spPr>
+        <p:txBody>
+          <a:bodyPr wrap="square" lIns="0" tIns="0" rIns="0" bIns="0" rtlCol="0" anchor="ctr"/>
+          <a:lstStyle/>
+          <a:p>
+            <a:pPr indent="0" marL="0">
+              <a:buNone/>
+            </a:pPr>
+            <a:r>
+              <a:rPr lang="en-US" sz="1050" b="1" dirty="0">
                 <a:solidFill>
                   <a:srgbClr val="0E8C81"/>
                 </a:solidFill>
@@ -7954,7 +7954,7 @@
               </a:rPr>
               <a:t>DECISION-LOG.md</a:t>
             </a:r>
-            <a:endParaRPr lang="en-US" sz="1100" dirty="0"/>
+            <a:endParaRPr lang="en-US" sz="1050" dirty="0"/>
           </a:p>
         </p:txBody>
       </p:sp>
@@ -7966,8 +7966,8 @@
         </p:nvSpPr>
         <p:spPr>
           <a:xfrm>
-            <a:off x="6556248" y="3776472"/>
-            <a:ext cx="5129784" cy="749808"/>
+            <a:off x="6556248" y="3310128"/>
+            <a:ext cx="5129784" cy="603504"/>
           </a:xfrm>
           <a:prstGeom prst="rect">
             <a:avLst/>
@@ -7981,12 +7981,12 @@
           <a:p>
             <a:pPr indent="0" marL="0">
               <a:lnSpc>
-                <a:spcPts val="1250"/>
+                <a:spcPts val="1150"/>
               </a:lnSpc>
               <a:buNone/>
             </a:pPr>
             <a:r>
-              <a:rPr lang="en-US" sz="1000" dirty="0">
+              <a:rPr lang="en-US" sz="950" dirty="0">
                 <a:solidFill>
                   <a:srgbClr val="5A6B8C"/>
                 </a:solidFill>
@@ -7996,7 +7996,7 @@
               </a:rPr>
               <a:t>Every flag resolution (F1–F19) with evidence and who approved. Your audit trail for every judgment call made across months of work.</a:t>
             </a:r>
-            <a:endParaRPr lang="en-US" sz="1000" dirty="0"/>
+            <a:endParaRPr lang="en-US" sz="950" dirty="0"/>
           </a:p>
         </p:txBody>
       </p:sp>
@@ -8008,12 +8008,12 @@
         </p:nvSpPr>
         <p:spPr>
           <a:xfrm>
-            <a:off x="502920" y="4745736"/>
-            <a:ext cx="5532120" cy="1207008"/>
+            <a:off x="502920" y="4078224"/>
+            <a:ext cx="5532120" cy="969264"/>
           </a:xfrm>
           <a:prstGeom prst="roundRect">
             <a:avLst>
-              <a:gd name="adj" fmla="val 6818"/>
+              <a:gd name="adj" fmla="val 8491"/>
             </a:avLst>
           </a:prstGeom>
           <a:solidFill>
@@ -8030,24 +8030,24 @@
         </p:nvSpPr>
         <p:spPr>
           <a:xfrm>
-            <a:off x="704088" y="4864608"/>
-            <a:ext cx="5129784" cy="274320"/>
-          </a:xfrm>
-          <a:prstGeom prst="rect">
-            <a:avLst/>
-          </a:prstGeom>
-          <a:noFill/>
-          <a:ln/>
-        </p:spPr>
-        <p:txBody>
-          <a:bodyPr wrap="square" lIns="0" tIns="0" rIns="0" bIns="0" rtlCol="0" anchor="ctr"/>
-          <a:lstStyle/>
-          <a:p>
-            <a:pPr indent="0" marL="0">
-              <a:buNone/>
-            </a:pPr>
-            <a:r>
-              <a:rPr lang="en-US" sz="1100" b="1" dirty="0">
+            <a:off x="704088" y="4160520"/>
+            <a:ext cx="5129784" cy="256032"/>
+          </a:xfrm>
+          <a:prstGeom prst="rect">
+            <a:avLst/>
+          </a:prstGeom>
+          <a:noFill/>
+          <a:ln/>
+        </p:spPr>
+        <p:txBody>
+          <a:bodyPr wrap="square" lIns="0" tIns="0" rIns="0" bIns="0" rtlCol="0" anchor="ctr"/>
+          <a:lstStyle/>
+          <a:p>
+            <a:pPr indent="0" marL="0">
+              <a:buNone/>
+            </a:pPr>
+            <a:r>
+              <a:rPr lang="en-US" sz="1050" b="1" dirty="0">
                 <a:solidFill>
                   <a:srgbClr val="0E8C81"/>
                 </a:solidFill>
@@ -8057,7 +8057,7 @@
               </a:rPr>
               <a:t>migration-cutover-table.md</a:t>
             </a:r>
-            <a:endParaRPr lang="en-US" sz="1100" dirty="0"/>
+            <a:endParaRPr lang="en-US" sz="1050" dirty="0"/>
           </a:p>
         </p:txBody>
       </p:sp>
@@ -8069,8 +8069,8 @@
         </p:nvSpPr>
         <p:spPr>
           <a:xfrm>
-            <a:off x="704088" y="5166360"/>
-            <a:ext cx="5129784" cy="749808"/>
+            <a:off x="704088" y="4425696"/>
+            <a:ext cx="5129784" cy="603504"/>
           </a:xfrm>
           <a:prstGeom prst="rect">
             <a:avLst/>
@@ -8084,12 +8084,12 @@
           <a:p>
             <a:pPr indent="0" marL="0">
               <a:lnSpc>
-                <a:spcPts val="1250"/>
+                <a:spcPts val="1150"/>
               </a:lnSpc>
               <a:buNone/>
             </a:pPr>
             <a:r>
-              <a:rPr lang="en-US" sz="1000" dirty="0">
+              <a:rPr lang="en-US" sz="950" dirty="0">
                 <a:solidFill>
                   <a:srgbClr val="5A6B8C"/>
                 </a:solidFill>
@@ -8099,7 +8099,7 @@
               </a:rPr>
               <a:t>What runs where, right now: MONOLITH → BUILT → SHADOW-RUNNING → CUT-OVER → RETIRED per slice. The Executor updates it the same session anything moves.</a:t>
             </a:r>
-            <a:endParaRPr lang="en-US" sz="1000" dirty="0"/>
+            <a:endParaRPr lang="en-US" sz="950" dirty="0"/>
           </a:p>
         </p:txBody>
       </p:sp>
@@ -8111,12 +8111,12 @@
         </p:nvSpPr>
         <p:spPr>
           <a:xfrm>
-            <a:off x="6355080" y="4745736"/>
-            <a:ext cx="5532120" cy="1207008"/>
+            <a:off x="6355080" y="4078224"/>
+            <a:ext cx="5532120" cy="969264"/>
           </a:xfrm>
           <a:prstGeom prst="roundRect">
             <a:avLst>
-              <a:gd name="adj" fmla="val 6818"/>
+              <a:gd name="adj" fmla="val 8491"/>
             </a:avLst>
           </a:prstGeom>
           <a:solidFill>
@@ -8133,24 +8133,24 @@
         </p:nvSpPr>
         <p:spPr>
           <a:xfrm>
-            <a:off x="6556248" y="4864608"/>
-            <a:ext cx="5129784" cy="274320"/>
-          </a:xfrm>
-          <a:prstGeom prst="rect">
-            <a:avLst/>
-          </a:prstGeom>
-          <a:noFill/>
-          <a:ln/>
-        </p:spPr>
-        <p:txBody>
-          <a:bodyPr wrap="square" lIns="0" tIns="0" rIns="0" bIns="0" rtlCol="0" anchor="ctr"/>
-          <a:lstStyle/>
-          <a:p>
-            <a:pPr indent="0" marL="0">
-              <a:buNone/>
-            </a:pPr>
-            <a:r>
-              <a:rPr lang="en-US" sz="1100" b="1" dirty="0">
+            <a:off x="6556248" y="4160520"/>
+            <a:ext cx="5129784" cy="256032"/>
+          </a:xfrm>
+          <a:prstGeom prst="rect">
+            <a:avLst/>
+          </a:prstGeom>
+          <a:noFill/>
+          <a:ln/>
+        </p:spPr>
+        <p:txBody>
+          <a:bodyPr wrap="square" lIns="0" tIns="0" rIns="0" bIns="0" rtlCol="0" anchor="ctr"/>
+          <a:lstStyle/>
+          <a:p>
+            <a:pPr indent="0" marL="0">
+              <a:buNone/>
+            </a:pPr>
+            <a:r>
+              <a:rPr lang="en-US" sz="1050" b="1" dirty="0">
                 <a:solidFill>
                   <a:srgbClr val="0E8C81"/>
                 </a:solidFill>
@@ -8160,7 +8160,7 @@
               </a:rPr>
               <a:t>migration-stack-analysis.md</a:t>
             </a:r>
-            <a:endParaRPr lang="en-US" sz="1100" dirty="0"/>
+            <a:endParaRPr lang="en-US" sz="1050" dirty="0"/>
           </a:p>
         </p:txBody>
       </p:sp>
@@ -8172,8 +8172,8 @@
         </p:nvSpPr>
         <p:spPr>
           <a:xfrm>
-            <a:off x="6556248" y="5166360"/>
-            <a:ext cx="5129784" cy="749808"/>
+            <a:off x="6556248" y="4425696"/>
+            <a:ext cx="5129784" cy="603504"/>
           </a:xfrm>
           <a:prstGeom prst="rect">
             <a:avLst/>
@@ -8187,12 +8187,12 @@
           <a:p>
             <a:pPr indent="0" marL="0">
               <a:lnSpc>
-                <a:spcPts val="1250"/>
+                <a:spcPts val="1150"/>
               </a:lnSpc>
               <a:buNone/>
             </a:pPr>
             <a:r>
-              <a:rPr lang="en-US" sz="1000" dirty="0">
+              <a:rPr lang="en-US" sz="950" dirty="0">
                 <a:solidFill>
                   <a:srgbClr val="5A6B8C"/>
                 </a:solidFill>
@@ -8202,7 +8202,110 @@
               </a:rPr>
               <a:t>The 653-file inventory the Advisor plans from. Executor touches affected entries whenever a session creates, moves, or deletes files.</a:t>
             </a:r>
-            <a:endParaRPr lang="en-US" sz="1000" dirty="0"/>
+            <a:endParaRPr lang="en-US" sz="950" dirty="0"/>
+          </a:p>
+        </p:txBody>
+      </p:sp>
+      <p:sp>
+        <p:nvSpPr>
+          <p:cNvPr id="23" name="Shape 21"/>
+          <p:cNvSpPr/>
+          <p:nvPr/>
+        </p:nvSpPr>
+        <p:spPr>
+          <a:xfrm>
+            <a:off x="502920" y="5193792"/>
+            <a:ext cx="5532120" cy="969264"/>
+          </a:xfrm>
+          <a:prstGeom prst="roundRect">
+            <a:avLst>
+              <a:gd name="adj" fmla="val 8491"/>
+            </a:avLst>
+          </a:prstGeom>
+          <a:solidFill>
+            <a:srgbClr val="FFF6E8"/>
+          </a:solidFill>
+          <a:ln/>
+        </p:spPr>
+      </p:sp>
+      <p:sp>
+        <p:nvSpPr>
+          <p:cNvPr id="24" name="Text 22"/>
+          <p:cNvSpPr/>
+          <p:nvPr/>
+        </p:nvSpPr>
+        <p:spPr>
+          <a:xfrm>
+            <a:off x="704088" y="5276088"/>
+            <a:ext cx="5129784" cy="256032"/>
+          </a:xfrm>
+          <a:prstGeom prst="rect">
+            <a:avLst/>
+          </a:prstGeom>
+          <a:noFill/>
+          <a:ln/>
+        </p:spPr>
+        <p:txBody>
+          <a:bodyPr wrap="square" lIns="0" tIns="0" rIns="0" bIns="0" rtlCol="0" anchor="ctr"/>
+          <a:lstStyle/>
+          <a:p>
+            <a:pPr indent="0" marL="0">
+              <a:buNone/>
+            </a:pPr>
+            <a:r>
+              <a:rPr lang="en-US" sz="1050" b="1" dirty="0">
+                <a:solidFill>
+                  <a:srgbClr val="B8860B"/>
+                </a:solidFill>
+                <a:latin typeface="Courier New" pitchFamily="34" charset="0"/>
+                <a:ea typeface="Courier New" pitchFamily="34" charset="-122"/>
+                <a:cs typeface="Courier New" pitchFamily="34" charset="-120"/>
+              </a:rPr>
+              <a:t>LESSONS-LEARNED.md</a:t>
+            </a:r>
+            <a:endParaRPr lang="en-US" sz="1050" dirty="0"/>
+          </a:p>
+        </p:txBody>
+      </p:sp>
+      <p:sp>
+        <p:nvSpPr>
+          <p:cNvPr id="25" name="Text 23"/>
+          <p:cNvSpPr/>
+          <p:nvPr/>
+        </p:nvSpPr>
+        <p:spPr>
+          <a:xfrm>
+            <a:off x="704088" y="5541264"/>
+            <a:ext cx="5129784" cy="603504"/>
+          </a:xfrm>
+          <a:prstGeom prst="rect">
+            <a:avLst/>
+          </a:prstGeom>
+          <a:noFill/>
+          <a:ln/>
+        </p:spPr>
+        <p:txBody>
+          <a:bodyPr wrap="square" lIns="0" tIns="0" rIns="0" bIns="0" rtlCol="0" anchor="ctr"/>
+          <a:lstStyle/>
+          <a:p>
+            <a:pPr indent="0" marL="0">
+              <a:lnSpc>
+                <a:spcPts val="1150"/>
+              </a:lnSpc>
+              <a:buNone/>
+            </a:pPr>
+            <a:r>
+              <a:rPr lang="en-US" sz="950" dirty="0">
+                <a:solidFill>
+                  <a:srgbClr val="5A6B8C"/>
+                </a:solidFill>
+                <a:latin typeface="Calibri" pitchFamily="34" charset="0"/>
+                <a:ea typeface="Calibri" pitchFamily="34" charset="-122"/>
+                <a:cs typeface="Calibri" pitchFamily="34" charset="-120"/>
+              </a:rPr>
+              <a:t>Skill memory: rules distilled from failures (L1, L2, ...) — read at every open, harvested at close, capped and consolidated so the reflexes stay sharp.</a:t>
+            </a:r>
+            <a:endParaRPr lang="en-US" sz="950" dirty="0"/>
           </a:p>
         </p:txBody>
       </p:sp>
